--- a/协作/提示词/分享PPT交接_2026-10-29/交付/烟花秀AI全流程_组内分享.pptx
+++ b/协作/提示词/分享PPT交接_2026-10-29/交付/烟花秀AI全流程_组内分享.pptx
@@ -831,7 +831,7 @@
           <a:p/>
           <a:p>
             <a:r>
-              <a:t>第二点是遇到问题怎么学。我的做法是先拆解，再量化，最后进引擎验证。仙女棒沿用烟花工坊原件分成 13 层，用高速摄影确认母粒会多级分叉；每层单独调粗细、亮度和分叉，编辑时分层，导出时合成一张 64 帧序列，PC 和手游都只用 1 个发射器。远处的火星会逐帧闪烁，查下来是镜头核下限太小，把下限从 0.28 像素提到 0.55 像素后，光量波动从 0.44 降到 0.007。升空尾缀远处看起来卡顿，我没有靠目测调，而是按 800 米观察距离、1080p 屏幕换算每帧位移，以实机流畅的金芒菊为基准，位移小于约 0.77 像素的阶段才减帧；近端新火花跟着弹体，远端老火花单独一段。卡顿最明显的一段从每秒 1.9 帧提高到 30 帧；GPU 火花原来一条尾缀同时约 1 万颗，现在按每条 800 的预算做。</a:t>
+              <a:t>第二点是遇到问题怎么学。我的做法是先拆解，再量化，最后进引擎验证。仙女棒沿用烟花工坊原件分成 13 层，动态上按快抛慢落来调，用高速摄影确认母粒会多级分叉；每层单独调粗细、亮度和分叉，编辑时分层，导出时合成一张 64 帧序列，PC 和手游都只用 1 个发射器。远处的火星会逐帧闪烁，查下来是镜头核下限太小，把下限从 0.28 像素提到 0.55 像素后，光量波动从 0.44 降到 0.007。升空尾缀远处看起来卡顿，我用数字来定帧率：按 800 米观察距离、1080p 屏幕换算每帧位移，以实机流畅的金芒菊为基准，位移小于约 0.77 像素的阶段才减帧；近端新火花跟着弹体，远端老火花单独一段。卡顿最明显的一段从每秒 1.9 帧提高到 30 帧；GPU 火花原来一条尾缀同时约 1 万颗，现在按每条 800 的预算做。</a:t>
             </a:r>
           </a:p>
         </p:txBody>
@@ -1439,7 +1439,7 @@
           <a:p/>
           <a:p>
             <a:r>
-              <a:t>分工上，目标、审美、引擎限制和验收标准由我来定，写成规则文档，AI 每次开工先读这些规则。AI 负责物理推导、写代码和出素材，交付前先过自检：每个效果 13 项标准检查，导出包有回放检查，推送前还有合入门禁。自检通过后，我在 UE 里验收，发现的问题写回规则，进入下一轮。活我分给了三十多个有名字的 AI 对话框，每个只管一个效果或一个工具，进度记在同一份状态清单里。下面是每天的提交：从 9 月 27 日到 10 月 29 日，32 天有提交，共约 2200 次，其中 352 次是本机显卡后台算完自动回传的。</a:t>
+              <a:t>分工上，目标、审美、引擎限制和验收标准由我来定，写成规则文档，AI 每次开工先读这些规则。AI 负责物理推导、写代码和出素材，交付前先过自检：每个效果 13 项标准检查，导出包有回放检查，推送前还有合入门禁。自检通过后，我在 UE 里验收，发现的问题写回规则，进入下一轮。活我分给了三十多个有名字的 AI 对话框，每个只管一个效果或一个工具，进度记在同一份状态清单里。下面是每天的提交：从 9 月 27 日到 10 月 29 日，32 天有提交，共约 2200 次，其中 352 次是本机显卡后台算完自动回传的；烘焙器从 1.0 迭代到 4.9.124，大约 200 个版本号。</a:t>
             </a:r>
           </a:p>
         </p:txBody>
@@ -4787,8 +4787,8 @@
         </p:nvSpPr>
         <p:spPr>
           <a:xfrm>
-            <a:off x="11394440" y="6527800"/>
-            <a:ext cx="721360" cy="254000"/>
+            <a:off x="11455400" y="6527800"/>
+            <a:ext cx="660400" cy="254000"/>
           </a:xfrm>
           <a:prstGeom prst="rect">
             <a:avLst/>
@@ -4818,8 +4818,8 @@
         </p:nvSpPr>
         <p:spPr>
           <a:xfrm>
-            <a:off x="11394440" y="6527800"/>
-            <a:ext cx="721360" cy="254000"/>
+            <a:off x="11455400" y="6527800"/>
+            <a:ext cx="660400" cy="254000"/>
           </a:xfrm>
           <a:prstGeom prst="rect">
             <a:avLst/>
@@ -4848,33 +4848,7 @@
                 <a:ea typeface="微软雅黑"/>
                 <a:cs typeface="微软雅黑"/>
               </a:rPr>
-              <a:t>UE</a:t>
-            </a:r>
-            <a:r>
-              <a:rPr sz="1200" b="0" lang="zh-CN" altLang="en-US">
-                <a:solidFill>
-                  <a:srgbClr val="F5F5F5">
-                    <a:alpha val="70000"/>
-                  </a:srgbClr>
-                </a:solidFill>
-                <a:latin typeface="微软雅黑"/>
-                <a:ea typeface="微软雅黑"/>
-                <a:cs typeface="微软雅黑"/>
-              </a:rPr>
-              <a:t> </a:t>
-            </a:r>
-            <a:r>
-              <a:rPr sz="1200" b="0" lang="zh-CN" altLang="en-US">
-                <a:solidFill>
-                  <a:srgbClr val="F5F5F5">
-                    <a:alpha val="70000"/>
-                  </a:srgbClr>
-                </a:solidFill>
-                <a:latin typeface="Consolas"/>
-                <a:ea typeface="微软雅黑"/>
-                <a:cs typeface="微软雅黑"/>
-              </a:rPr>
-              <a:t>实机</a:t>
+              <a:t>示意图</a:t>
             </a:r>
           </a:p>
         </p:txBody>
@@ -28417,7 +28391,7 @@
                 <a:ea typeface="微软雅黑"/>
                 <a:cs typeface="微软雅黑"/>
               </a:rPr>
-              <a:t>共约</a:t>
+              <a:t>约</a:t>
             </a:r>
             <a:r>
               <a:rPr sz="1200" b="0" lang="zh-CN" altLang="en-US">
@@ -28599,7 +28573,7 @@
                 <a:ea typeface="微软雅黑"/>
                 <a:cs typeface="微软雅黑"/>
               </a:rPr>
-              <a:t>本机显卡后台回传</a:t>
+              <a:t>显卡后台回传</a:t>
             </a:r>
             <a:r>
               <a:rPr sz="1200" b="0" lang="zh-CN" altLang="en-US">
@@ -28652,6 +28626,136 @@
                 <a:cs typeface="微软雅黑"/>
               </a:rPr>
               <a:t>次</a:t>
+            </a:r>
+            <a:r>
+              <a:rPr sz="1200" b="0" lang="zh-CN" altLang="en-US">
+                <a:solidFill>
+                  <a:srgbClr val="F5F5F5">
+                    <a:alpha val="55000"/>
+                  </a:srgbClr>
+                </a:solidFill>
+                <a:latin typeface="微软雅黑"/>
+                <a:ea typeface="微软雅黑"/>
+                <a:cs typeface="微软雅黑"/>
+              </a:rPr>
+              <a:t> </a:t>
+            </a:r>
+            <a:r>
+              <a:rPr sz="1200" b="0" lang="zh-CN" altLang="en-US">
+                <a:solidFill>
+                  <a:srgbClr val="F5F5F5">
+                    <a:alpha val="55000"/>
+                  </a:srgbClr>
+                </a:solidFill>
+                <a:latin typeface="Consolas"/>
+                <a:ea typeface="微软雅黑"/>
+                <a:cs typeface="微软雅黑"/>
+              </a:rPr>
+              <a:t>·</a:t>
+            </a:r>
+            <a:r>
+              <a:rPr sz="1200" b="0" lang="zh-CN" altLang="en-US">
+                <a:solidFill>
+                  <a:srgbClr val="F5F5F5">
+                    <a:alpha val="55000"/>
+                  </a:srgbClr>
+                </a:solidFill>
+                <a:latin typeface="微软雅黑"/>
+                <a:ea typeface="微软雅黑"/>
+                <a:cs typeface="微软雅黑"/>
+              </a:rPr>
+              <a:t> </a:t>
+            </a:r>
+            <a:r>
+              <a:rPr sz="1200" b="0" lang="zh-CN" altLang="en-US">
+                <a:solidFill>
+                  <a:srgbClr val="F5F5F5">
+                    <a:alpha val="55000"/>
+                  </a:srgbClr>
+                </a:solidFill>
+                <a:latin typeface="Consolas"/>
+                <a:ea typeface="微软雅黑"/>
+                <a:cs typeface="微软雅黑"/>
+              </a:rPr>
+              <a:t>烘焙器</a:t>
+            </a:r>
+            <a:r>
+              <a:rPr sz="1200" b="0" lang="zh-CN" altLang="en-US">
+                <a:solidFill>
+                  <a:srgbClr val="F5F5F5">
+                    <a:alpha val="55000"/>
+                  </a:srgbClr>
+                </a:solidFill>
+                <a:latin typeface="微软雅黑"/>
+                <a:ea typeface="微软雅黑"/>
+                <a:cs typeface="微软雅黑"/>
+              </a:rPr>
+              <a:t> </a:t>
+            </a:r>
+            <a:r>
+              <a:rPr sz="1200" b="0" lang="zh-CN" altLang="en-US">
+                <a:solidFill>
+                  <a:srgbClr val="F5F5F5">
+                    <a:alpha val="55000"/>
+                  </a:srgbClr>
+                </a:solidFill>
+                <a:latin typeface="Consolas"/>
+                <a:ea typeface="微软雅黑"/>
+                <a:cs typeface="微软雅黑"/>
+              </a:rPr>
+              <a:t>1.0</a:t>
+            </a:r>
+            <a:r>
+              <a:rPr sz="1200" b="0" lang="zh-CN" altLang="en-US">
+                <a:solidFill>
+                  <a:srgbClr val="F5F5F5">
+                    <a:alpha val="55000"/>
+                  </a:srgbClr>
+                </a:solidFill>
+                <a:latin typeface="微软雅黑"/>
+                <a:ea typeface="微软雅黑"/>
+                <a:cs typeface="微软雅黑"/>
+              </a:rPr>
+              <a:t> </a:t>
+            </a:r>
+            <a:r>
+              <a:rPr sz="1200" b="0" lang="zh-CN" altLang="en-US">
+                <a:solidFill>
+                  <a:srgbClr val="F5F5F5">
+                    <a:alpha val="55000"/>
+                  </a:srgbClr>
+                </a:solidFill>
+                <a:latin typeface="Consolas"/>
+                <a:ea typeface="微软雅黑"/>
+                <a:cs typeface="微软雅黑"/>
+              </a:rPr>
+              <a:t>→</a:t>
+            </a:r>
+            <a:r>
+              <a:rPr sz="1200" b="0" lang="zh-CN" altLang="en-US">
+                <a:solidFill>
+                  <a:srgbClr val="F5F5F5">
+                    <a:alpha val="55000"/>
+                  </a:srgbClr>
+                </a:solidFill>
+                <a:latin typeface="微软雅黑"/>
+                <a:ea typeface="微软雅黑"/>
+                <a:cs typeface="微软雅黑"/>
+              </a:rPr>
+              <a:t> </a:t>
+            </a:r>
+            <a:r>
+              <a:rPr sz="1200" b="0" lang="zh-CN" altLang="en-US">
+                <a:solidFill>
+                  <a:srgbClr val="F5F5F5">
+                    <a:alpha val="55000"/>
+                  </a:srgbClr>
+                </a:solidFill>
+                <a:latin typeface="Consolas"/>
+                <a:ea typeface="微软雅黑"/>
+                <a:cs typeface="微软雅黑"/>
+              </a:rPr>
+              <a:t>4.9.124</a:t>
             </a:r>
           </a:p>
         </p:txBody>

--- a/协作/提示词/分享PPT交接_2026-10-29/交付/烟花秀AI全流程_组内分享.pptx
+++ b/协作/提示词/分享PPT交接_2026-10-29/交付/烟花秀AI全流程_组内分享.pptx
@@ -5011,7 +5011,7 @@
         </p:nvSpPr>
         <p:spPr>
           <a:xfrm>
-            <a:off x="609600" y="1905000"/>
+            <a:off x="609600" y="1117600"/>
             <a:ext cx="6985000" cy="228600"/>
           </a:xfrm>
           <a:prstGeom prst="rect">
@@ -5118,7 +5118,7 @@
         </p:nvSpPr>
         <p:spPr>
           <a:xfrm>
-            <a:off x="609600" y="2235200"/>
+            <a:off x="609600" y="1435100"/>
             <a:ext cx="8255000" cy="889000"/>
           </a:xfrm>
           <a:prstGeom prst="rect">
@@ -5203,7 +5203,7 @@
         </p:nvSpPr>
         <p:spPr>
           <a:xfrm>
-            <a:off x="609600" y="3238500"/>
+            <a:off x="609600" y="2451100"/>
             <a:ext cx="6985000" cy="355600"/>
           </a:xfrm>
           <a:prstGeom prst="rect">
@@ -5350,7 +5350,7 @@
         </p:nvSpPr>
         <p:spPr>
           <a:xfrm>
-            <a:off x="609600" y="3606800"/>
+            <a:off x="609600" y="2819400"/>
             <a:ext cx="6985000" cy="279400"/>
           </a:xfrm>
           <a:prstGeom prst="rect">
@@ -5393,7 +5393,7 @@
         </p:nvSpPr>
         <p:spPr>
           <a:xfrm>
-            <a:off x="609600" y="4127500"/>
+            <a:off x="609600" y="3327400"/>
             <a:ext cx="457200" cy="38100"/>
           </a:xfrm>
           <a:prstGeom prst="rect">
@@ -5422,15 +5422,15 @@
         </p:nvSpPr>
         <p:spPr>
           <a:xfrm>
-            <a:off x="609600" y="5156200"/>
-            <a:ext cx="5461000" cy="6350"/>
+            <a:off x="609600" y="4546600"/>
+            <a:ext cx="2032000" cy="6350"/>
           </a:xfrm>
           <a:prstGeom prst="rect">
             <a:avLst/>
           </a:prstGeom>
           <a:solidFill>
             <a:srgbClr val="F5F5F5">
-              <a:alpha val="12000"/>
+              <a:alpha val="14000"/>
             </a:srgbClr>
           </a:solidFill>
           <a:ln>
@@ -5453,8 +5453,8 @@
         </p:nvSpPr>
         <p:spPr>
           <a:xfrm>
-            <a:off x="609600" y="5321300"/>
-            <a:ext cx="254000" cy="254000"/>
+            <a:off x="609600" y="4673600"/>
+            <a:ext cx="279400" cy="254000"/>
           </a:xfrm>
           <a:prstGeom prst="rect">
             <a:avLst/>
@@ -5469,11 +5469,11 @@
           <a:p>
             <a:pPr algn="l">
               <a:lnSpc>
-                <a:spcPts val="1820"/>
+                <a:spcPts val="1690"/>
               </a:lnSpc>
             </a:pPr>
             <a:r>
-              <a:rPr sz="1400" b="1" lang="zh-CN" altLang="en-US">
+              <a:rPr sz="1300" b="1" lang="zh-CN" altLang="en-US">
                 <a:solidFill>
                   <a:srgbClr val="0FF796"/>
                 </a:solidFill>
@@ -5494,8 +5494,8 @@
         </p:nvSpPr>
         <p:spPr>
           <a:xfrm>
-            <a:off x="901700" y="5321300"/>
-            <a:ext cx="419100" cy="254000"/>
+            <a:off x="939800" y="4673600"/>
+            <a:ext cx="1905000" cy="254000"/>
           </a:xfrm>
           <a:prstGeom prst="rect">
             <a:avLst/>
@@ -5510,11 +5510,11 @@
           <a:p>
             <a:pPr algn="l">
               <a:lnSpc>
-                <a:spcPts val="1820"/>
+                <a:spcPts val="1690"/>
               </a:lnSpc>
             </a:pPr>
             <a:r>
-              <a:rPr sz="1400" b="0" lang="zh-CN" altLang="en-US">
+              <a:rPr sz="1300" b="0" lang="zh-CN" altLang="en-US">
                 <a:solidFill>
                   <a:srgbClr val="F5F5F5">
                     <a:alpha val="70000"/>
@@ -5537,8 +5537,8 @@
         </p:nvSpPr>
         <p:spPr>
           <a:xfrm>
-            <a:off x="1562100" y="5321300"/>
-            <a:ext cx="254000" cy="254000"/>
+            <a:off x="609600" y="4965700"/>
+            <a:ext cx="279400" cy="254000"/>
           </a:xfrm>
           <a:prstGeom prst="rect">
             <a:avLst/>
@@ -5553,11 +5553,11 @@
           <a:p>
             <a:pPr algn="l">
               <a:lnSpc>
-                <a:spcPts val="1820"/>
+                <a:spcPts val="1690"/>
               </a:lnSpc>
             </a:pPr>
             <a:r>
-              <a:rPr sz="1400" b="1" lang="zh-CN" altLang="en-US">
+              <a:rPr sz="1300" b="1" lang="zh-CN" altLang="en-US">
                 <a:solidFill>
                   <a:srgbClr val="0FF796"/>
                 </a:solidFill>
@@ -5578,8 +5578,8 @@
         </p:nvSpPr>
         <p:spPr>
           <a:xfrm>
-            <a:off x="1854200" y="5321300"/>
-            <a:ext cx="774700" cy="254000"/>
+            <a:off x="939800" y="4965700"/>
+            <a:ext cx="1905000" cy="254000"/>
           </a:xfrm>
           <a:prstGeom prst="rect">
             <a:avLst/>
@@ -5594,11 +5594,11 @@
           <a:p>
             <a:pPr algn="l">
               <a:lnSpc>
-                <a:spcPts val="1820"/>
+                <a:spcPts val="1690"/>
               </a:lnSpc>
             </a:pPr>
             <a:r>
-              <a:rPr sz="1400" b="0" lang="zh-CN" altLang="en-US">
+              <a:rPr sz="1300" b="0" lang="zh-CN" altLang="en-US">
                 <a:solidFill>
                   <a:srgbClr val="F5F5F5">
                     <a:alpha val="70000"/>
@@ -5621,8 +5621,8 @@
         </p:nvSpPr>
         <p:spPr>
           <a:xfrm>
-            <a:off x="2870200" y="5321300"/>
-            <a:ext cx="254000" cy="254000"/>
+            <a:off x="609600" y="5257800"/>
+            <a:ext cx="279400" cy="254000"/>
           </a:xfrm>
           <a:prstGeom prst="rect">
             <a:avLst/>
@@ -5637,11 +5637,11 @@
           <a:p>
             <a:pPr algn="l">
               <a:lnSpc>
-                <a:spcPts val="1820"/>
+                <a:spcPts val="1690"/>
               </a:lnSpc>
             </a:pPr>
             <a:r>
-              <a:rPr sz="1400" b="1" lang="zh-CN" altLang="en-US">
+              <a:rPr sz="1300" b="1" lang="zh-CN" altLang="en-US">
                 <a:solidFill>
                   <a:srgbClr val="0FF796"/>
                 </a:solidFill>
@@ -5662,8 +5662,8 @@
         </p:nvSpPr>
         <p:spPr>
           <a:xfrm>
-            <a:off x="3162300" y="5321300"/>
-            <a:ext cx="952500" cy="254000"/>
+            <a:off x="939800" y="5257800"/>
+            <a:ext cx="1905000" cy="254000"/>
           </a:xfrm>
           <a:prstGeom prst="rect">
             <a:avLst/>
@@ -5678,11 +5678,11 @@
           <a:p>
             <a:pPr algn="l">
               <a:lnSpc>
-                <a:spcPts val="1820"/>
+                <a:spcPts val="1690"/>
               </a:lnSpc>
             </a:pPr>
             <a:r>
-              <a:rPr sz="1400" b="0" lang="zh-CN" altLang="en-US">
+              <a:rPr sz="1300" b="0" lang="zh-CN" altLang="en-US">
                 <a:solidFill>
                   <a:srgbClr val="F5F5F5">
                     <a:alpha val="70000"/>
@@ -5705,8 +5705,8 @@
         </p:nvSpPr>
         <p:spPr>
           <a:xfrm>
-            <a:off x="4356100" y="5321300"/>
-            <a:ext cx="254000" cy="254000"/>
+            <a:off x="609600" y="5549900"/>
+            <a:ext cx="279400" cy="254000"/>
           </a:xfrm>
           <a:prstGeom prst="rect">
             <a:avLst/>
@@ -5721,11 +5721,11 @@
           <a:p>
             <a:pPr algn="l">
               <a:lnSpc>
-                <a:spcPts val="1820"/>
+                <a:spcPts val="1690"/>
               </a:lnSpc>
             </a:pPr>
             <a:r>
-              <a:rPr sz="1400" b="1" lang="zh-CN" altLang="en-US">
+              <a:rPr sz="1300" b="1" lang="zh-CN" altLang="en-US">
                 <a:solidFill>
                   <a:srgbClr val="0FF796"/>
                 </a:solidFill>
@@ -5746,8 +5746,8 @@
         </p:nvSpPr>
         <p:spPr>
           <a:xfrm>
-            <a:off x="4648200" y="5321300"/>
-            <a:ext cx="596900" cy="254000"/>
+            <a:off x="939800" y="5549900"/>
+            <a:ext cx="1905000" cy="254000"/>
           </a:xfrm>
           <a:prstGeom prst="rect">
             <a:avLst/>
@@ -5762,11 +5762,11 @@
           <a:p>
             <a:pPr algn="l">
               <a:lnSpc>
-                <a:spcPts val="1820"/>
+                <a:spcPts val="1690"/>
               </a:lnSpc>
             </a:pPr>
             <a:r>
-              <a:rPr sz="1400" b="0" lang="zh-CN" altLang="en-US">
+              <a:rPr sz="1300" b="0" lang="zh-CN" altLang="en-US">
                 <a:solidFill>
                   <a:srgbClr val="F5F5F5">
                     <a:alpha val="70000"/>
@@ -5789,8 +5789,8 @@
         </p:nvSpPr>
         <p:spPr>
           <a:xfrm>
-            <a:off x="5486400" y="5321300"/>
-            <a:ext cx="254000" cy="254000"/>
+            <a:off x="609600" y="5842000"/>
+            <a:ext cx="279400" cy="254000"/>
           </a:xfrm>
           <a:prstGeom prst="rect">
             <a:avLst/>
@@ -5805,11 +5805,11 @@
           <a:p>
             <a:pPr algn="l">
               <a:lnSpc>
-                <a:spcPts val="1820"/>
+                <a:spcPts val="1690"/>
               </a:lnSpc>
             </a:pPr>
             <a:r>
-              <a:rPr sz="1400" b="1" lang="zh-CN" altLang="en-US">
+              <a:rPr sz="1300" b="1" lang="zh-CN" altLang="en-US">
                 <a:solidFill>
                   <a:srgbClr val="0FF796"/>
                 </a:solidFill>
@@ -5830,8 +5830,8 @@
         </p:nvSpPr>
         <p:spPr>
           <a:xfrm>
-            <a:off x="5778500" y="5321300"/>
-            <a:ext cx="419100" cy="254000"/>
+            <a:off x="939800" y="5842000"/>
+            <a:ext cx="1905000" cy="254000"/>
           </a:xfrm>
           <a:prstGeom prst="rect">
             <a:avLst/>
@@ -5846,11 +5846,11 @@
           <a:p>
             <a:pPr algn="l">
               <a:lnSpc>
-                <a:spcPts val="1820"/>
+                <a:spcPts val="1690"/>
               </a:lnSpc>
             </a:pPr>
             <a:r>
-              <a:rPr sz="1400" b="0" lang="zh-CN" altLang="en-US">
+              <a:rPr sz="1300" b="0" lang="zh-CN" altLang="en-US">
                 <a:solidFill>
                   <a:srgbClr val="F5F5F5">
                     <a:alpha val="70000"/>
